--- a/courses/俄语课件/俄语_Day3_L1.pptx
+++ b/courses/俄语课件/俄语_Day3_L1.pptx
@@ -9,7 +9,6 @@
     <p:sldId id="257" r:id="rId8"/>
     <p:sldId id="258" r:id="rId9"/>
     <p:sldId id="259" r:id="rId10"/>
-    <p:sldId id="260" r:id="rId11"/>
   </p:sldIdLst>
   <p:sldSz cx="9144000" cy="6858000" type="screen4x3"/>
   <p:notesSz cx="6858000" cy="9144000"/>
@@ -3200,66 +3199,14 @@
               </a:defRPr>
             </a:pPr>
             <a:r>
-              <a:t>名词第4格</a:t>
-            </a:r>
-          </a:p>
-        </p:txBody>
-      </p:sp>
-      <p:sp>
-        <p:nvSpPr>
-          <p:cNvPr id="5" name="Rounded Rectangle 4"/>
-          <p:cNvSpPr/>
-          <p:nvPr/>
-        </p:nvSpPr>
-        <p:spPr>
-          <a:xfrm>
-            <a:off x="1828800" y="4572000"/>
-            <a:ext cx="5486400" cy="731520"/>
-          </a:xfrm>
-          <a:prstGeom prst="roundRect">
-            <a:avLst/>
-          </a:prstGeom>
-          <a:solidFill>
-            <a:srgbClr val="4682B4"/>
-          </a:solidFill>
-          <a:ln>
-            <a:noFill/>
-          </a:ln>
-        </p:spPr>
-        <p:style>
-          <a:lnRef idx="1">
-            <a:schemeClr val="accent1"/>
-          </a:lnRef>
-          <a:fillRef idx="3">
-            <a:schemeClr val="accent1"/>
-          </a:fillRef>
-          <a:effectRef idx="2">
-            <a:schemeClr val="accent1"/>
-          </a:effectRef>
-          <a:fontRef idx="minor">
-            <a:schemeClr val="lt1"/>
-          </a:fontRef>
-        </p:style>
-        <p:txBody>
-          <a:bodyPr rtlCol="0" anchor="ctr"/>
-          <a:lstStyle/>
-          <a:p>
-            <a:pPr algn="ctr">
-              <a:defRPr sz="2200">
-                <a:solidFill>
-                  <a:srgbClr val="FFFFFF"/>
-                </a:solidFill>
-              </a:defRPr>
-            </a:pPr>
-            <a:r>
-              <a:t>Vinitelny padesh</a:t>
-            </a:r>
-          </a:p>
-        </p:txBody>
-      </p:sp>
-      <p:sp>
-        <p:nvSpPr>
-          <p:cNvPr id="6" name="TextBox 5"/>
+              <a:t>名词第4格（做什么）</a:t>
+            </a:r>
+          </a:p>
+        </p:txBody>
+      </p:sp>
+      <p:sp>
+        <p:nvSpPr>
+          <p:cNvPr id="5" name="TextBox 4"/>
           <p:cNvSpPr txBox="1"/>
           <p:nvPr/>
         </p:nvSpPr>
@@ -3287,7 +3234,7 @@
               </a:defRPr>
             </a:pPr>
             <a:r>
-              <a:t>Day3/84</a:t>
+              <a:t>День 3/84</a:t>
             </a:r>
           </a:p>
         </p:txBody>
@@ -3418,7 +3365,7 @@
               </a:defRPr>
             </a:pPr>
             <a:r>
-              <a:t>Vinitelny padesh</a:t>
+              <a:t>Винительный падеж</a:t>
             </a:r>
           </a:p>
         </p:txBody>
@@ -3453,7 +3400,7 @@
               </a:defRPr>
             </a:pPr>
             <a:r>
-              <a:t>第4格 = 直接宾语，表示'做什么/把谁'</a:t>
+              <a:t>第4格 = 直接宾语，表示«做什么/把谁»</a:t>
             </a:r>
           </a:p>
         </p:txBody>
@@ -3488,7 +3435,7 @@
               </a:defRPr>
             </a:pPr>
             <a:r>
-              <a:t>Ya chitayu knigu. = 我读书。</a:t>
+              <a:t>Я читаю книгу. = 我读书。</a:t>
             </a:r>
           </a:p>
         </p:txBody>
@@ -3540,7 +3487,7 @@
               </a:defRPr>
             </a:pPr>
             <a:r>
-              <a:t>On vidit drugа. = 他看见朋友。</a:t>
+              <a:t>Он видит друга. = 他看见朋友。</a:t>
             </a:r>
           </a:p>
         </p:txBody>
@@ -3592,7 +3539,7 @@
               </a:defRPr>
             </a:pPr>
             <a:r>
-              <a:t>第4格回答问题：kogo? chto? (谁？什么？)</a:t>
+              <a:t>第4格回答问题：кого? что? (谁？什么？)</a:t>
             </a:r>
           </a:p>
         </p:txBody>
@@ -3627,7 +3574,7 @@
               </a:defRPr>
             </a:pPr>
             <a:r>
-              <a:t>Day3/84</a:t>
+              <a:t>День 3/84</a:t>
             </a:r>
           </a:p>
         </p:txBody>
@@ -3758,7 +3705,7 @@
               </a:defRPr>
             </a:pPr>
             <a:r>
-              <a:t>Sklonenie</a:t>
+              <a:t>Склонение</a:t>
             </a:r>
           </a:p>
         </p:txBody>
@@ -3828,7 +3775,7 @@
               </a:defRPr>
             </a:pPr>
             <a:r>
-              <a:t>student &gt; studenta (看见学生)</a:t>
+              <a:t>студдент → студента (看见学生)</a:t>
             </a:r>
           </a:p>
         </p:txBody>
@@ -3863,7 +3810,7 @@
               </a:defRPr>
             </a:pPr>
             <a:r>
-              <a:t>drug &gt; druga (看见朋友)</a:t>
+              <a:t>друг → друга (看见朋友)</a:t>
             </a:r>
           </a:p>
         </p:txBody>
@@ -3933,7 +3880,7 @@
               </a:defRPr>
             </a:pPr>
             <a:r>
-              <a:t>dom &gt; dom (看见房子)</a:t>
+              <a:t>дом → дом (看见房子) — 同第1格</a:t>
             </a:r>
           </a:p>
         </p:txBody>
@@ -4003,7 +3950,7 @@
               </a:defRPr>
             </a:pPr>
             <a:r>
-              <a:t>kniga &gt; knigu (看见书)</a:t>
+              <a:t>книга → книгу (看见书)</a:t>
             </a:r>
           </a:p>
         </p:txBody>
@@ -4090,7 +4037,7 @@
               </a:defRPr>
             </a:pPr>
             <a:r>
-              <a:t>Day3/84</a:t>
+              <a:t>День 3/84</a:t>
             </a:r>
           </a:p>
         </p:txBody>
@@ -4186,7 +4133,7 @@
               </a:defRPr>
             </a:pPr>
             <a:r>
-              <a:t>三、第四格与完成体</a:t>
+              <a:t>三、课后练习</a:t>
             </a:r>
           </a:p>
         </p:txBody>
@@ -4221,7 +4168,7 @@
               </a:defRPr>
             </a:pPr>
             <a:r>
-              <a:t>Sovershennyy vid</a:t>
+              <a:t>Упражнения</a:t>
             </a:r>
           </a:p>
         </p:txBody>
@@ -4249,14 +4196,14 @@
           <a:lstStyle/>
           <a:p>
             <a:pPr>
-              <a:defRPr sz="1600" b="1">
-                <a:solidFill>
-                  <a:srgbClr val="1E3C72"/>
+              <a:defRPr sz="1500">
+                <a:solidFill>
+                  <a:srgbClr val="333333"/>
                 </a:solidFill>
               </a:defRPr>
             </a:pPr>
             <a:r>
-              <a:t>未完成体：Ya chitayu knigu. = 我在读书。</a:t>
+              <a:t>1. 将下列名词变为第4格：</a:t>
             </a:r>
           </a:p>
         </p:txBody>
@@ -4269,7 +4216,7 @@
         </p:nvSpPr>
         <p:spPr>
           <a:xfrm>
-            <a:off x="457200" y="1828800"/>
+            <a:off x="457200" y="1847088"/>
             <a:ext cx="8229600" cy="365760"/>
           </a:xfrm>
           <a:prstGeom prst="rect">
@@ -4284,184 +4231,28 @@
           <a:lstStyle/>
           <a:p>
             <a:pPr>
-              <a:defRPr sz="1600" b="1">
-                <a:solidFill>
-                  <a:srgbClr val="1E3C72"/>
+              <a:defRPr sz="1500">
+                <a:solidFill>
+                  <a:srgbClr val="333333"/>
                 </a:solidFill>
               </a:defRPr>
             </a:pPr>
             <a:r>
-              <a:t>完成体：Ya prochitayu knigu. = 我读完书了。</a:t>
-            </a:r>
-          </a:p>
-        </p:txBody>
-      </p:sp>
-      <p:sp>
-        <p:nvSpPr>
-          <p:cNvPr id="7" name="Rounded Rectangle 6"/>
-          <p:cNvSpPr/>
-          <p:nvPr/>
-        </p:nvSpPr>
-        <p:spPr>
-          <a:xfrm>
-            <a:off x="457200" y="2194560"/>
-            <a:ext cx="8229600" cy="502920"/>
-          </a:xfrm>
-          <a:prstGeom prst="roundRect">
-            <a:avLst/>
-          </a:prstGeom>
-          <a:solidFill>
-            <a:srgbClr val="4682B4"/>
-          </a:solidFill>
-          <a:ln>
-            <a:noFill/>
-          </a:ln>
-        </p:spPr>
-        <p:style>
-          <a:lnRef idx="1">
-            <a:schemeClr val="accent1"/>
-          </a:lnRef>
-          <a:fillRef idx="3">
-            <a:schemeClr val="accent1"/>
-          </a:fillRef>
-          <a:effectRef idx="2">
-            <a:schemeClr val="accent1"/>
-          </a:effectRef>
-          <a:fontRef idx="minor">
-            <a:schemeClr val="lt1"/>
-          </a:fontRef>
-        </p:style>
-        <p:txBody>
-          <a:bodyPr rtlCol="0" anchor="ctr" wrap="square"/>
-          <a:lstStyle/>
-          <a:p>
-            <a:pPr algn="ctr">
-              <a:defRPr sz="1500">
-                <a:solidFill>
-                  <a:srgbClr val="FFFFFF"/>
-                </a:solidFill>
-              </a:defRPr>
-            </a:pPr>
-            <a:r>
-              <a:t>Ya-delayu zadachu. = 我在做作业。</a:t>
-            </a:r>
-          </a:p>
-        </p:txBody>
-      </p:sp>
-      <p:sp>
-        <p:nvSpPr>
-          <p:cNvPr id="8" name="Rounded Rectangle 7"/>
-          <p:cNvSpPr/>
-          <p:nvPr/>
-        </p:nvSpPr>
-        <p:spPr>
-          <a:xfrm>
-            <a:off x="457200" y="2834639"/>
-            <a:ext cx="8229600" cy="502920"/>
-          </a:xfrm>
-          <a:prstGeom prst="roundRect">
-            <a:avLst/>
-          </a:prstGeom>
-          <a:solidFill>
-            <a:srgbClr val="4682B4"/>
-          </a:solidFill>
-          <a:ln>
-            <a:noFill/>
-          </a:ln>
-        </p:spPr>
-        <p:style>
-          <a:lnRef idx="1">
-            <a:schemeClr val="accent1"/>
-          </a:lnRef>
-          <a:fillRef idx="3">
-            <a:schemeClr val="accent1"/>
-          </a:fillRef>
-          <a:effectRef idx="2">
-            <a:schemeClr val="accent1"/>
-          </a:effectRef>
-          <a:fontRef idx="minor">
-            <a:schemeClr val="lt1"/>
-          </a:fontRef>
-        </p:style>
-        <p:txBody>
-          <a:bodyPr rtlCol="0" anchor="ctr" wrap="square"/>
-          <a:lstStyle/>
-          <a:p>
-            <a:pPr algn="ctr">
-              <a:defRPr sz="1500">
-                <a:solidFill>
-                  <a:srgbClr val="FFFFFF"/>
-                </a:solidFill>
-              </a:defRPr>
-            </a:pPr>
-            <a:r>
-              <a:t>Ya sdayu zadachu. = 我提交作业。</a:t>
-            </a:r>
-          </a:p>
-        </p:txBody>
-      </p:sp>
-      <p:sp>
-        <p:nvSpPr>
-          <p:cNvPr id="9" name="Rounded Rectangle 8"/>
-          <p:cNvSpPr/>
-          <p:nvPr/>
-        </p:nvSpPr>
-        <p:spPr>
-          <a:xfrm>
-            <a:off x="457200" y="3474720"/>
-            <a:ext cx="8229600" cy="457200"/>
-          </a:xfrm>
-          <a:prstGeom prst="roundRect">
-            <a:avLst/>
-          </a:prstGeom>
-          <a:solidFill>
-            <a:srgbClr val="B48C32"/>
-          </a:solidFill>
-          <a:ln>
-            <a:noFill/>
-          </a:ln>
-        </p:spPr>
-        <p:style>
-          <a:lnRef idx="1">
-            <a:schemeClr val="accent1"/>
-          </a:lnRef>
-          <a:fillRef idx="3">
-            <a:schemeClr val="accent1"/>
-          </a:fillRef>
-          <a:effectRef idx="2">
-            <a:schemeClr val="accent1"/>
-          </a:effectRef>
-          <a:fontRef idx="minor">
-            <a:schemeClr val="lt1"/>
-          </a:fontRef>
-        </p:style>
-        <p:txBody>
-          <a:bodyPr rtlCol="0" anchor="ctr" wrap="square"/>
-          <a:lstStyle/>
-          <a:p>
-            <a:pPr algn="ctr">
-              <a:defRPr sz="1400">
-                <a:solidFill>
-                  <a:srgbClr val="FFFFFF"/>
-                </a:solidFill>
-              </a:defRPr>
-            </a:pPr>
-            <a:r>
-              <a:t>完成体强调结果，未完成体强调过程</a:t>
-            </a:r>
-          </a:p>
-        </p:txBody>
-      </p:sp>
-      <p:sp>
-        <p:nvSpPr>
-          <p:cNvPr id="10" name="TextBox 9"/>
+              <a:t>   дом, книга, друг, студдент</a:t>
+            </a:r>
+          </a:p>
+        </p:txBody>
+      </p:sp>
+      <p:sp>
+        <p:nvSpPr>
+          <p:cNvPr id="7" name="TextBox 6"/>
           <p:cNvSpPr txBox="1"/>
           <p:nvPr/>
         </p:nvSpPr>
         <p:spPr>
           <a:xfrm>
-            <a:off x="7772400" y="6583680"/>
-            <a:ext cx="1188720" cy="274320"/>
+            <a:off x="457200" y="2231136"/>
+            <a:ext cx="8229600" cy="365760"/>
           </a:xfrm>
           <a:prstGeom prst="rect">
             <a:avLst/>
@@ -4474,90 +4265,26 @@
           </a:bodyPr>
           <a:lstStyle/>
           <a:p>
-            <a:pPr algn="r">
-              <a:defRPr sz="1100">
-                <a:solidFill>
-                  <a:srgbClr val="A0A0A0"/>
+            <a:pPr>
+              <a:defRPr sz="1500">
+                <a:solidFill>
+                  <a:srgbClr val="333333"/>
                 </a:solidFill>
               </a:defRPr>
             </a:pPr>
-            <a:r>
-              <a:t>Day3/84</a:t>
-            </a:r>
-          </a:p>
-        </p:txBody>
-      </p:sp>
-    </p:spTree>
-  </p:cSld>
-  <p:clrMapOvr>
-    <a:masterClrMapping/>
-  </p:clrMapOvr>
-</p:sld>
-</file>
-
-<file path=ppt/slides/slide5.xml><?xml version="1.0" encoding="utf-8"?>
-<p:sld xmlns:a="http://schemas.openxmlformats.org/drawingml/2006/main" xmlns:p="http://schemas.openxmlformats.org/presentationml/2006/main" xmlns:r="http://schemas.openxmlformats.org/officeDocument/2006/relationships">
-  <p:cSld>
-    <p:spTree>
-      <p:nvGrpSpPr>
-        <p:cNvPr id="1" name=""/>
-        <p:cNvGrpSpPr/>
-        <p:nvPr/>
-      </p:nvGrpSpPr>
-      <p:grpSpPr/>
-      <p:sp>
-        <p:nvSpPr>
-          <p:cNvPr id="2" name="Rectangle 1"/>
-          <p:cNvSpPr/>
-          <p:nvPr/>
-        </p:nvSpPr>
-        <p:spPr>
-          <a:xfrm>
-            <a:off x="0" y="0"/>
-            <a:ext cx="9144000" cy="1280160"/>
-          </a:xfrm>
-          <a:prstGeom prst="rect">
-            <a:avLst/>
-          </a:prstGeom>
-          <a:solidFill>
-            <a:srgbClr val="1E3C72"/>
-          </a:solidFill>
-          <a:ln>
-            <a:noFill/>
-          </a:ln>
-        </p:spPr>
-        <p:style>
-          <a:lnRef idx="1">
-            <a:schemeClr val="accent1"/>
-          </a:lnRef>
-          <a:fillRef idx="3">
-            <a:schemeClr val="accent1"/>
-          </a:fillRef>
-          <a:effectRef idx="2">
-            <a:schemeClr val="accent1"/>
-          </a:effectRef>
-          <a:fontRef idx="minor">
-            <a:schemeClr val="lt1"/>
-          </a:fontRef>
-        </p:style>
-        <p:txBody>
-          <a:bodyPr rtlCol="0" anchor="ctr"/>
-          <a:lstStyle/>
-          <a:p>
-            <a:pPr algn="ctr"/>
-          </a:p>
-        </p:txBody>
-      </p:sp>
-      <p:sp>
-        <p:nvSpPr>
-          <p:cNvPr id="3" name="TextBox 2"/>
+          </a:p>
+        </p:txBody>
+      </p:sp>
+      <p:sp>
+        <p:nvSpPr>
+          <p:cNvPr id="8" name="TextBox 7"/>
           <p:cNvSpPr txBox="1"/>
           <p:nvPr/>
         </p:nvSpPr>
         <p:spPr>
           <a:xfrm>
-            <a:off x="457200" y="228600"/>
-            <a:ext cx="8229600" cy="640080"/>
+            <a:off x="457200" y="2615184"/>
+            <a:ext cx="8229600" cy="365760"/>
           </a:xfrm>
           <a:prstGeom prst="rect">
             <a:avLst/>
@@ -4571,27 +4298,27 @@
           <a:lstStyle/>
           <a:p>
             <a:pPr>
-              <a:defRPr sz="3200" b="1">
-                <a:solidFill>
-                  <a:srgbClr val="FFFFFF"/>
+              <a:defRPr sz="1500">
+                <a:solidFill>
+                  <a:srgbClr val="333333"/>
                 </a:solidFill>
               </a:defRPr>
             </a:pPr>
             <a:r>
-              <a:t>四、课后练习</a:t>
-            </a:r>
-          </a:p>
-        </p:txBody>
-      </p:sp>
-      <p:sp>
-        <p:nvSpPr>
-          <p:cNvPr id="4" name="TextBox 3"/>
+              <a:t>2. 中译俄：</a:t>
+            </a:r>
+          </a:p>
+        </p:txBody>
+      </p:sp>
+      <p:sp>
+        <p:nvSpPr>
+          <p:cNvPr id="9" name="TextBox 8"/>
           <p:cNvSpPr txBox="1"/>
           <p:nvPr/>
         </p:nvSpPr>
         <p:spPr>
           <a:xfrm>
-            <a:off x="457200" y="777240"/>
+            <a:off x="457200" y="2999232"/>
             <a:ext cx="8229600" cy="365760"/>
           </a:xfrm>
           <a:prstGeom prst="rect">
@@ -4606,27 +4333,27 @@
           <a:lstStyle/>
           <a:p>
             <a:pPr>
-              <a:defRPr sz="1800">
-                <a:solidFill>
-                  <a:srgbClr val="C8DCFF"/>
+              <a:defRPr sz="1500">
+                <a:solidFill>
+                  <a:srgbClr val="333333"/>
                 </a:solidFill>
               </a:defRPr>
             </a:pPr>
             <a:r>
-              <a:t>Uprazhneniya</a:t>
-            </a:r>
-          </a:p>
-        </p:txBody>
-      </p:sp>
-      <p:sp>
-        <p:nvSpPr>
-          <p:cNvPr id="5" name="TextBox 4"/>
+              <a:t>   我在读书。</a:t>
+            </a:r>
+          </a:p>
+        </p:txBody>
+      </p:sp>
+      <p:sp>
+        <p:nvSpPr>
+          <p:cNvPr id="10" name="TextBox 9"/>
           <p:cNvSpPr txBox="1"/>
           <p:nvPr/>
         </p:nvSpPr>
         <p:spPr>
           <a:xfrm>
-            <a:off x="457200" y="1463040"/>
+            <a:off x="457200" y="3383279"/>
             <a:ext cx="8229600" cy="365760"/>
           </a:xfrm>
           <a:prstGeom prst="rect">
@@ -4648,20 +4375,20 @@
               </a:defRPr>
             </a:pPr>
             <a:r>
-              <a:t>1. 将下列名词变为第4格：</a:t>
-            </a:r>
-          </a:p>
-        </p:txBody>
-      </p:sp>
-      <p:sp>
-        <p:nvSpPr>
-          <p:cNvPr id="6" name="TextBox 5"/>
+              <a:t>   他看见了朋友。</a:t>
+            </a:r>
+          </a:p>
+        </p:txBody>
+      </p:sp>
+      <p:sp>
+        <p:nvSpPr>
+          <p:cNvPr id="11" name="TextBox 10"/>
           <p:cNvSpPr txBox="1"/>
           <p:nvPr/>
         </p:nvSpPr>
         <p:spPr>
           <a:xfrm>
-            <a:off x="457200" y="1847088"/>
+            <a:off x="457200" y="3767328"/>
             <a:ext cx="8229600" cy="365760"/>
           </a:xfrm>
           <a:prstGeom prst="rect">
@@ -4683,21 +4410,21 @@
               </a:defRPr>
             </a:pPr>
             <a:r>
-              <a:t>   dom, kniga, drug, student</a:t>
-            </a:r>
-          </a:p>
-        </p:txBody>
-      </p:sp>
-      <p:sp>
-        <p:nvSpPr>
-          <p:cNvPr id="7" name="TextBox 6"/>
+              <a:t>   妈妈在做汤。</a:t>
+            </a:r>
+          </a:p>
+        </p:txBody>
+      </p:sp>
+      <p:sp>
+        <p:nvSpPr>
+          <p:cNvPr id="12" name="TextBox 11"/>
           <p:cNvSpPr txBox="1"/>
           <p:nvPr/>
         </p:nvSpPr>
         <p:spPr>
           <a:xfrm>
-            <a:off x="457200" y="2231136"/>
-            <a:ext cx="8229600" cy="365760"/>
+            <a:off x="7772400" y="6583680"/>
+            <a:ext cx="1188720" cy="274320"/>
           </a:xfrm>
           <a:prstGeom prst="rect">
             <a:avLst/>
@@ -4710,178 +4437,6 @@
           </a:bodyPr>
           <a:lstStyle/>
           <a:p>
-            <a:pPr>
-              <a:defRPr sz="1500">
-                <a:solidFill>
-                  <a:srgbClr val="333333"/>
-                </a:solidFill>
-              </a:defRPr>
-            </a:pPr>
-          </a:p>
-        </p:txBody>
-      </p:sp>
-      <p:sp>
-        <p:nvSpPr>
-          <p:cNvPr id="8" name="TextBox 7"/>
-          <p:cNvSpPr txBox="1"/>
-          <p:nvPr/>
-        </p:nvSpPr>
-        <p:spPr>
-          <a:xfrm>
-            <a:off x="457200" y="2615184"/>
-            <a:ext cx="8229600" cy="365760"/>
-          </a:xfrm>
-          <a:prstGeom prst="rect">
-            <a:avLst/>
-          </a:prstGeom>
-          <a:noFill/>
-        </p:spPr>
-        <p:txBody>
-          <a:bodyPr wrap="none">
-            <a:spAutoFit/>
-          </a:bodyPr>
-          <a:lstStyle/>
-          <a:p>
-            <a:pPr>
-              <a:defRPr sz="1500">
-                <a:solidFill>
-                  <a:srgbClr val="333333"/>
-                </a:solidFill>
-              </a:defRPr>
-            </a:pPr>
-            <a:r>
-              <a:t>2. 中译俄：</a:t>
-            </a:r>
-          </a:p>
-        </p:txBody>
-      </p:sp>
-      <p:sp>
-        <p:nvSpPr>
-          <p:cNvPr id="9" name="TextBox 8"/>
-          <p:cNvSpPr txBox="1"/>
-          <p:nvPr/>
-        </p:nvSpPr>
-        <p:spPr>
-          <a:xfrm>
-            <a:off x="457200" y="2999232"/>
-            <a:ext cx="8229600" cy="365760"/>
-          </a:xfrm>
-          <a:prstGeom prst="rect">
-            <a:avLst/>
-          </a:prstGeom>
-          <a:noFill/>
-        </p:spPr>
-        <p:txBody>
-          <a:bodyPr wrap="none">
-            <a:spAutoFit/>
-          </a:bodyPr>
-          <a:lstStyle/>
-          <a:p>
-            <a:pPr>
-              <a:defRPr sz="1500">
-                <a:solidFill>
-                  <a:srgbClr val="333333"/>
-                </a:solidFill>
-              </a:defRPr>
-            </a:pPr>
-            <a:r>
-              <a:t>   我在读书。</a:t>
-            </a:r>
-          </a:p>
-        </p:txBody>
-      </p:sp>
-      <p:sp>
-        <p:nvSpPr>
-          <p:cNvPr id="10" name="TextBox 9"/>
-          <p:cNvSpPr txBox="1"/>
-          <p:nvPr/>
-        </p:nvSpPr>
-        <p:spPr>
-          <a:xfrm>
-            <a:off x="457200" y="3383279"/>
-            <a:ext cx="8229600" cy="365760"/>
-          </a:xfrm>
-          <a:prstGeom prst="rect">
-            <a:avLst/>
-          </a:prstGeom>
-          <a:noFill/>
-        </p:spPr>
-        <p:txBody>
-          <a:bodyPr wrap="none">
-            <a:spAutoFit/>
-          </a:bodyPr>
-          <a:lstStyle/>
-          <a:p>
-            <a:pPr>
-              <a:defRPr sz="1500">
-                <a:solidFill>
-                  <a:srgbClr val="333333"/>
-                </a:solidFill>
-              </a:defRPr>
-            </a:pPr>
-            <a:r>
-              <a:t>   他看见了朋友。</a:t>
-            </a:r>
-          </a:p>
-        </p:txBody>
-      </p:sp>
-      <p:sp>
-        <p:nvSpPr>
-          <p:cNvPr id="11" name="TextBox 10"/>
-          <p:cNvSpPr txBox="1"/>
-          <p:nvPr/>
-        </p:nvSpPr>
-        <p:spPr>
-          <a:xfrm>
-            <a:off x="457200" y="3767328"/>
-            <a:ext cx="8229600" cy="365760"/>
-          </a:xfrm>
-          <a:prstGeom prst="rect">
-            <a:avLst/>
-          </a:prstGeom>
-          <a:noFill/>
-        </p:spPr>
-        <p:txBody>
-          <a:bodyPr wrap="none">
-            <a:spAutoFit/>
-          </a:bodyPr>
-          <a:lstStyle/>
-          <a:p>
-            <a:pPr>
-              <a:defRPr sz="1500">
-                <a:solidFill>
-                  <a:srgbClr val="333333"/>
-                </a:solidFill>
-              </a:defRPr>
-            </a:pPr>
-            <a:r>
-              <a:t>   妈妈在做汤。</a:t>
-            </a:r>
-          </a:p>
-        </p:txBody>
-      </p:sp>
-      <p:sp>
-        <p:nvSpPr>
-          <p:cNvPr id="12" name="TextBox 11"/>
-          <p:cNvSpPr txBox="1"/>
-          <p:nvPr/>
-        </p:nvSpPr>
-        <p:spPr>
-          <a:xfrm>
-            <a:off x="7772400" y="6583680"/>
-            <a:ext cx="1188720" cy="274320"/>
-          </a:xfrm>
-          <a:prstGeom prst="rect">
-            <a:avLst/>
-          </a:prstGeom>
-          <a:noFill/>
-        </p:spPr>
-        <p:txBody>
-          <a:bodyPr wrap="none">
-            <a:spAutoFit/>
-          </a:bodyPr>
-          <a:lstStyle/>
-          <a:p>
             <a:pPr algn="r">
               <a:defRPr sz="1100">
                 <a:solidFill>
@@ -4890,7 +4445,7 @@
               </a:defRPr>
             </a:pPr>
             <a:r>
-              <a:t>Day3/84</a:t>
+              <a:t>День 3/84</a:t>
             </a:r>
           </a:p>
         </p:txBody>
